--- a/Prezentare.pptx
+++ b/Prezentare.pptx
@@ -5,7 +5,7 @@
     <p:sldMasterId id="2147483648" r:id="rId1"/>
   </p:sldMasterIdLst>
   <p:notesMasterIdLst>
-    <p:notesMasterId r:id="rId12"/>
+    <p:notesMasterId r:id="rId16"/>
   </p:notesMasterIdLst>
   <p:sldIdLst>
     <p:sldId id="256" r:id="rId2"/>
@@ -17,7 +17,11 @@
     <p:sldId id="261" r:id="rId8"/>
     <p:sldId id="262" r:id="rId9"/>
     <p:sldId id="263" r:id="rId10"/>
-    <p:sldId id="264" r:id="rId11"/>
+    <p:sldId id="266" r:id="rId11"/>
+    <p:sldId id="267" r:id="rId12"/>
+    <p:sldId id="268" r:id="rId13"/>
+    <p:sldId id="269" r:id="rId14"/>
+    <p:sldId id="264" r:id="rId15"/>
   </p:sldIdLst>
   <p:sldSz cx="9144000" cy="5143500" type="screen16x9"/>
   <p:notesSz cx="5143500" cy="9144000"/>
@@ -404,6 +408,342 @@
     </p:spTree>
     <p:extLst>
       <p:ext uri="{BB962C8B-B14F-4D97-AF65-F5344CB8AC3E}">
+        <p14:creationId xmlns:p14="http://schemas.microsoft.com/office/powerpoint/2010/main" val="3460844051"/>
+      </p:ext>
+    </p:extLst>
+  </p:cSld>
+  <p:clrMapOvr>
+    <a:masterClrMapping/>
+  </p:clrMapOvr>
+</p:notes>
+</file>
+
+<file path=ppt/notesSlides/notesSlide11.xml><?xml version="1.0" encoding="utf-8"?>
+<p:notes xmlns:a="http://schemas.openxmlformats.org/drawingml/2006/main" xmlns:r="http://schemas.openxmlformats.org/officeDocument/2006/relationships" xmlns:p="http://schemas.openxmlformats.org/presentationml/2006/main">
+  <p:cSld>
+    <p:spTree>
+      <p:nvGrpSpPr>
+        <p:cNvPr id="1" name=""/>
+        <p:cNvGrpSpPr/>
+        <p:nvPr/>
+      </p:nvGrpSpPr>
+      <p:grpSpPr>
+        <a:xfrm>
+          <a:off x="0" y="0"/>
+          <a:ext cx="0" cy="0"/>
+          <a:chOff x="0" y="0"/>
+          <a:chExt cx="0" cy="0"/>
+        </a:xfrm>
+      </p:grpSpPr>
+      <p:sp>
+        <p:nvSpPr>
+          <p:cNvPr id="2" name="Slide Image Placeholder 1"/>
+          <p:cNvSpPr>
+            <a:spLocks noGrp="1" noRot="1" noChangeAspect="1"/>
+          </p:cNvSpPr>
+          <p:nvPr>
+            <p:ph type="sldImg"/>
+          </p:nvPr>
+        </p:nvSpPr>
+        <p:spPr/>
+      </p:sp>
+      <p:sp>
+        <p:nvSpPr>
+          <p:cNvPr id="3" name="Notes Placeholder 2"/>
+          <p:cNvSpPr>
+            <a:spLocks noGrp="1"/>
+          </p:cNvSpPr>
+          <p:nvPr>
+            <p:ph type="body" idx="1"/>
+          </p:nvPr>
+        </p:nvSpPr>
+        <p:spPr/>
+        <p:txBody>
+          <a:bodyPr/>
+          <a:lstStyle/>
+          <a:p>
+            <a:endParaRPr lang="en-US" dirty="0"/>
+          </a:p>
+        </p:txBody>
+      </p:sp>
+      <p:sp>
+        <p:nvSpPr>
+          <p:cNvPr id="4" name="Slide Number Placeholder 3"/>
+          <p:cNvSpPr>
+            <a:spLocks noGrp="1"/>
+          </p:cNvSpPr>
+          <p:nvPr>
+            <p:ph type="sldNum" sz="quarter" idx="10"/>
+          </p:nvPr>
+        </p:nvSpPr>
+        <p:spPr/>
+        <p:txBody>
+          <a:bodyPr/>
+          <a:lstStyle/>
+          <a:p>
+            <a:fld id="{F7021451-1387-4CA6-816F-3879F97B5CBC}" type="slidenum">
+              <a:rPr lang="en-US"/>
+              <a:t>11</a:t>
+            </a:fld>
+            <a:endParaRPr lang="en-US"/>
+          </a:p>
+        </p:txBody>
+      </p:sp>
+    </p:spTree>
+    <p:extLst>
+      <p:ext uri="{BB962C8B-B14F-4D97-AF65-F5344CB8AC3E}">
+        <p14:creationId xmlns:p14="http://schemas.microsoft.com/office/powerpoint/2010/main" val="2607976626"/>
+      </p:ext>
+    </p:extLst>
+  </p:cSld>
+  <p:clrMapOvr>
+    <a:masterClrMapping/>
+  </p:clrMapOvr>
+</p:notes>
+</file>
+
+<file path=ppt/notesSlides/notesSlide12.xml><?xml version="1.0" encoding="utf-8"?>
+<p:notes xmlns:a="http://schemas.openxmlformats.org/drawingml/2006/main" xmlns:r="http://schemas.openxmlformats.org/officeDocument/2006/relationships" xmlns:p="http://schemas.openxmlformats.org/presentationml/2006/main">
+  <p:cSld>
+    <p:spTree>
+      <p:nvGrpSpPr>
+        <p:cNvPr id="1" name=""/>
+        <p:cNvGrpSpPr/>
+        <p:nvPr/>
+      </p:nvGrpSpPr>
+      <p:grpSpPr>
+        <a:xfrm>
+          <a:off x="0" y="0"/>
+          <a:ext cx="0" cy="0"/>
+          <a:chOff x="0" y="0"/>
+          <a:chExt cx="0" cy="0"/>
+        </a:xfrm>
+      </p:grpSpPr>
+      <p:sp>
+        <p:nvSpPr>
+          <p:cNvPr id="2" name="Slide Image Placeholder 1"/>
+          <p:cNvSpPr>
+            <a:spLocks noGrp="1" noRot="1" noChangeAspect="1"/>
+          </p:cNvSpPr>
+          <p:nvPr>
+            <p:ph type="sldImg"/>
+          </p:nvPr>
+        </p:nvSpPr>
+        <p:spPr/>
+      </p:sp>
+      <p:sp>
+        <p:nvSpPr>
+          <p:cNvPr id="3" name="Notes Placeholder 2"/>
+          <p:cNvSpPr>
+            <a:spLocks noGrp="1"/>
+          </p:cNvSpPr>
+          <p:nvPr>
+            <p:ph type="body" idx="1"/>
+          </p:nvPr>
+        </p:nvSpPr>
+        <p:spPr/>
+        <p:txBody>
+          <a:bodyPr/>
+          <a:lstStyle/>
+          <a:p>
+            <a:endParaRPr lang="en-US" dirty="0"/>
+          </a:p>
+        </p:txBody>
+      </p:sp>
+      <p:sp>
+        <p:nvSpPr>
+          <p:cNvPr id="4" name="Slide Number Placeholder 3"/>
+          <p:cNvSpPr>
+            <a:spLocks noGrp="1"/>
+          </p:cNvSpPr>
+          <p:nvPr>
+            <p:ph type="sldNum" sz="quarter" idx="10"/>
+          </p:nvPr>
+        </p:nvSpPr>
+        <p:spPr/>
+        <p:txBody>
+          <a:bodyPr/>
+          <a:lstStyle/>
+          <a:p>
+            <a:fld id="{F7021451-1387-4CA6-816F-3879F97B5CBC}" type="slidenum">
+              <a:rPr lang="en-US"/>
+              <a:t>12</a:t>
+            </a:fld>
+            <a:endParaRPr lang="en-US"/>
+          </a:p>
+        </p:txBody>
+      </p:sp>
+    </p:spTree>
+    <p:extLst>
+      <p:ext uri="{BB962C8B-B14F-4D97-AF65-F5344CB8AC3E}">
+        <p14:creationId xmlns:p14="http://schemas.microsoft.com/office/powerpoint/2010/main" val="546077443"/>
+      </p:ext>
+    </p:extLst>
+  </p:cSld>
+  <p:clrMapOvr>
+    <a:masterClrMapping/>
+  </p:clrMapOvr>
+</p:notes>
+</file>
+
+<file path=ppt/notesSlides/notesSlide13.xml><?xml version="1.0" encoding="utf-8"?>
+<p:notes xmlns:a="http://schemas.openxmlformats.org/drawingml/2006/main" xmlns:r="http://schemas.openxmlformats.org/officeDocument/2006/relationships" xmlns:p="http://schemas.openxmlformats.org/presentationml/2006/main">
+  <p:cSld>
+    <p:spTree>
+      <p:nvGrpSpPr>
+        <p:cNvPr id="1" name=""/>
+        <p:cNvGrpSpPr/>
+        <p:nvPr/>
+      </p:nvGrpSpPr>
+      <p:grpSpPr>
+        <a:xfrm>
+          <a:off x="0" y="0"/>
+          <a:ext cx="0" cy="0"/>
+          <a:chOff x="0" y="0"/>
+          <a:chExt cx="0" cy="0"/>
+        </a:xfrm>
+      </p:grpSpPr>
+      <p:sp>
+        <p:nvSpPr>
+          <p:cNvPr id="2" name="Slide Image Placeholder 1"/>
+          <p:cNvSpPr>
+            <a:spLocks noGrp="1" noRot="1" noChangeAspect="1"/>
+          </p:cNvSpPr>
+          <p:nvPr>
+            <p:ph type="sldImg"/>
+          </p:nvPr>
+        </p:nvSpPr>
+        <p:spPr/>
+      </p:sp>
+      <p:sp>
+        <p:nvSpPr>
+          <p:cNvPr id="3" name="Notes Placeholder 2"/>
+          <p:cNvSpPr>
+            <a:spLocks noGrp="1"/>
+          </p:cNvSpPr>
+          <p:nvPr>
+            <p:ph type="body" idx="1"/>
+          </p:nvPr>
+        </p:nvSpPr>
+        <p:spPr/>
+        <p:txBody>
+          <a:bodyPr/>
+          <a:lstStyle/>
+          <a:p>
+            <a:endParaRPr lang="en-US" dirty="0"/>
+          </a:p>
+        </p:txBody>
+      </p:sp>
+      <p:sp>
+        <p:nvSpPr>
+          <p:cNvPr id="4" name="Slide Number Placeholder 3"/>
+          <p:cNvSpPr>
+            <a:spLocks noGrp="1"/>
+          </p:cNvSpPr>
+          <p:nvPr>
+            <p:ph type="sldNum" sz="quarter" idx="10"/>
+          </p:nvPr>
+        </p:nvSpPr>
+        <p:spPr/>
+        <p:txBody>
+          <a:bodyPr/>
+          <a:lstStyle/>
+          <a:p>
+            <a:fld id="{F7021451-1387-4CA6-816F-3879F97B5CBC}" type="slidenum">
+              <a:rPr lang="en-US"/>
+              <a:t>13</a:t>
+            </a:fld>
+            <a:endParaRPr lang="en-US"/>
+          </a:p>
+        </p:txBody>
+      </p:sp>
+    </p:spTree>
+    <p:extLst>
+      <p:ext uri="{BB962C8B-B14F-4D97-AF65-F5344CB8AC3E}">
+        <p14:creationId xmlns:p14="http://schemas.microsoft.com/office/powerpoint/2010/main" val="3931983905"/>
+      </p:ext>
+    </p:extLst>
+  </p:cSld>
+  <p:clrMapOvr>
+    <a:masterClrMapping/>
+  </p:clrMapOvr>
+</p:notes>
+</file>
+
+<file path=ppt/notesSlides/notesSlide14.xml><?xml version="1.0" encoding="utf-8"?>
+<p:notes xmlns:a="http://schemas.openxmlformats.org/drawingml/2006/main" xmlns:r="http://schemas.openxmlformats.org/officeDocument/2006/relationships" xmlns:p="http://schemas.openxmlformats.org/presentationml/2006/main">
+  <p:cSld>
+    <p:spTree>
+      <p:nvGrpSpPr>
+        <p:cNvPr id="1" name=""/>
+        <p:cNvGrpSpPr/>
+        <p:nvPr/>
+      </p:nvGrpSpPr>
+      <p:grpSpPr>
+        <a:xfrm>
+          <a:off x="0" y="0"/>
+          <a:ext cx="0" cy="0"/>
+          <a:chOff x="0" y="0"/>
+          <a:chExt cx="0" cy="0"/>
+        </a:xfrm>
+      </p:grpSpPr>
+      <p:sp>
+        <p:nvSpPr>
+          <p:cNvPr id="2" name="Slide Image Placeholder 1"/>
+          <p:cNvSpPr>
+            <a:spLocks noGrp="1" noRot="1" noChangeAspect="1"/>
+          </p:cNvSpPr>
+          <p:nvPr>
+            <p:ph type="sldImg"/>
+          </p:nvPr>
+        </p:nvSpPr>
+        <p:spPr/>
+      </p:sp>
+      <p:sp>
+        <p:nvSpPr>
+          <p:cNvPr id="3" name="Notes Placeholder 2"/>
+          <p:cNvSpPr>
+            <a:spLocks noGrp="1"/>
+          </p:cNvSpPr>
+          <p:nvPr>
+            <p:ph type="body" idx="1"/>
+          </p:nvPr>
+        </p:nvSpPr>
+        <p:spPr/>
+        <p:txBody>
+          <a:bodyPr/>
+          <a:lstStyle/>
+          <a:p>
+            <a:endParaRPr lang="en-US" dirty="0"/>
+          </a:p>
+        </p:txBody>
+      </p:sp>
+      <p:sp>
+        <p:nvSpPr>
+          <p:cNvPr id="4" name="Slide Number Placeholder 3"/>
+          <p:cNvSpPr>
+            <a:spLocks noGrp="1"/>
+          </p:cNvSpPr>
+          <p:nvPr>
+            <p:ph type="sldNum" sz="quarter" idx="10"/>
+          </p:nvPr>
+        </p:nvSpPr>
+        <p:spPr/>
+        <p:txBody>
+          <a:bodyPr/>
+          <a:lstStyle/>
+          <a:p>
+            <a:fld id="{F7021451-1387-4CA6-816F-3879F97B5CBC}" type="slidenum">
+              <a:rPr lang="en-US"/>
+              <a:t>14</a:t>
+            </a:fld>
+            <a:endParaRPr lang="en-US"/>
+          </a:p>
+        </p:txBody>
+      </p:sp>
+    </p:spTree>
+    <p:extLst>
+      <p:ext uri="{BB962C8B-B14F-4D97-AF65-F5344CB8AC3E}">
         <p14:creationId xmlns:p14="http://schemas.microsoft.com/office/powerpoint/2010/main" val="1024086991"/>
       </p:ext>
     </p:extLst>
@@ -1630,6 +1970,758 @@
 </file>
 
 <file path=ppt/slides/slide10.xml><?xml version="1.0" encoding="utf-8"?>
+<p:sld xmlns:a="http://schemas.openxmlformats.org/drawingml/2006/main" xmlns:r="http://schemas.openxmlformats.org/officeDocument/2006/relationships" xmlns:p="http://schemas.openxmlformats.org/presentationml/2006/main">
+  <p:cSld>
+    <p:spTree>
+      <p:nvGrpSpPr>
+        <p:cNvPr id="1" name=""/>
+        <p:cNvGrpSpPr/>
+        <p:nvPr/>
+      </p:nvGrpSpPr>
+      <p:grpSpPr>
+        <a:xfrm>
+          <a:off x="0" y="0"/>
+          <a:ext cx="0" cy="0"/>
+          <a:chOff x="0" y="0"/>
+          <a:chExt cx="0" cy="0"/>
+        </a:xfrm>
+      </p:grpSpPr>
+      <p:sp>
+        <p:nvSpPr>
+          <p:cNvPr id="2" name="Shape 0"/>
+          <p:cNvSpPr/>
+          <p:nvPr/>
+        </p:nvSpPr>
+        <p:spPr>
+          <a:xfrm>
+            <a:off x="0" y="0"/>
+            <a:ext cx="9144000" cy="685800"/>
+          </a:xfrm>
+          <a:prstGeom prst="rect">
+            <a:avLst/>
+          </a:prstGeom>
+          <a:solidFill>
+            <a:srgbClr val="1E2761"/>
+          </a:solidFill>
+          <a:ln w="12700">
+            <a:solidFill>
+              <a:srgbClr val="1E2761"/>
+            </a:solidFill>
+            <a:prstDash val="solid"/>
+          </a:ln>
+        </p:spPr>
+      </p:sp>
+      <p:sp>
+        <p:nvSpPr>
+          <p:cNvPr id="3" name="Text 1"/>
+          <p:cNvSpPr/>
+          <p:nvPr/>
+        </p:nvSpPr>
+        <p:spPr>
+          <a:xfrm>
+            <a:off x="274320" y="0"/>
+            <a:ext cx="8595360" cy="685800"/>
+          </a:xfrm>
+          <a:prstGeom prst="rect">
+            <a:avLst/>
+          </a:prstGeom>
+          <a:noFill/>
+          <a:ln/>
+        </p:spPr>
+        <p:txBody>
+          <a:bodyPr wrap="square" rtlCol="0" anchor="ctr"/>
+          <a:lstStyle/>
+          <a:p>
+            <a:pPr marL="0" indent="0">
+              <a:buNone/>
+            </a:pPr>
+            <a:r>
+              <a:rPr lang="en-US" sz="2200" b="1" dirty="0">
+                <a:solidFill>
+                  <a:srgbClr val="FFFFFF"/>
+                </a:solidFill>
+                <a:latin typeface="Calibri" pitchFamily="34" charset="0"/>
+                <a:ea typeface="Calibri" pitchFamily="34" charset="-122"/>
+                <a:cs typeface="Calibri" pitchFamily="34" charset="-120"/>
+              </a:rPr>
+              <a:t>5. Testing and Simulation Results</a:t>
+            </a:r>
+            <a:endParaRPr lang="en-US" sz="2200" dirty="0"/>
+          </a:p>
+        </p:txBody>
+      </p:sp>
+      <p:sp>
+        <p:nvSpPr>
+          <p:cNvPr id="154" name="Text 152"/>
+          <p:cNvSpPr/>
+          <p:nvPr/>
+        </p:nvSpPr>
+        <p:spPr>
+          <a:xfrm>
+            <a:off x="5669280" y="1371600"/>
+            <a:ext cx="3200400" cy="914400"/>
+          </a:xfrm>
+          <a:prstGeom prst="rect">
+            <a:avLst/>
+          </a:prstGeom>
+          <a:noFill/>
+          <a:ln/>
+        </p:spPr>
+        <p:txBody>
+          <a:bodyPr wrap="square" rtlCol="0" anchor="ctr"/>
+          <a:lstStyle/>
+          <a:p>
+            <a:pPr marL="0" indent="0">
+              <a:buNone/>
+            </a:pPr>
+            <a:endParaRPr lang="en-US" sz="1100" dirty="0"/>
+          </a:p>
+        </p:txBody>
+      </p:sp>
+      <p:sp>
+        <p:nvSpPr>
+          <p:cNvPr id="155" name="TextBox 154">
+            <a:extLst>
+              <a:ext uri="{FF2B5EF4-FFF2-40B4-BE49-F238E27FC236}">
+                <a16:creationId xmlns:a16="http://schemas.microsoft.com/office/drawing/2014/main" id="{AC4B3823-F6A6-4F65-8531-2446F76852A5}"/>
+              </a:ext>
+            </a:extLst>
+          </p:cNvPr>
+          <p:cNvSpPr txBox="1"/>
+          <p:nvPr/>
+        </p:nvSpPr>
+        <p:spPr>
+          <a:xfrm>
+            <a:off x="274320" y="844034"/>
+            <a:ext cx="2087880" cy="369332"/>
+          </a:xfrm>
+          <a:prstGeom prst="rect">
+            <a:avLst/>
+          </a:prstGeom>
+          <a:noFill/>
+        </p:spPr>
+        <p:txBody>
+          <a:bodyPr wrap="square" rtlCol="0">
+            <a:spAutoFit/>
+          </a:bodyPr>
+          <a:lstStyle/>
+          <a:p>
+            <a:r>
+              <a:rPr lang="en-US" dirty="0"/>
+              <a:t>ADUNARE</a:t>
+            </a:r>
+          </a:p>
+        </p:txBody>
+      </p:sp>
+      <p:pic>
+        <p:nvPicPr>
+          <p:cNvPr id="156" name="Picture 155">
+            <a:extLst>
+              <a:ext uri="{FF2B5EF4-FFF2-40B4-BE49-F238E27FC236}">
+                <a16:creationId xmlns:a16="http://schemas.microsoft.com/office/drawing/2014/main" id="{72EC8017-7587-472C-B372-55E4D9BEFF05}"/>
+              </a:ext>
+            </a:extLst>
+          </p:cNvPr>
+          <p:cNvPicPr/>
+          <p:nvPr/>
+        </p:nvPicPr>
+        <p:blipFill>
+          <a:blip r:embed="rId3" cstate="print">
+            <a:extLst>
+              <a:ext uri="{28A0092B-C50C-407E-A947-70E740481C1C}">
+                <a14:useLocalDpi xmlns:a14="http://schemas.microsoft.com/office/drawing/2010/main" val="0"/>
+              </a:ext>
+            </a:extLst>
+          </a:blip>
+          <a:stretch>
+            <a:fillRect/>
+          </a:stretch>
+        </p:blipFill>
+        <p:spPr>
+          <a:xfrm>
+            <a:off x="1836420" y="1612266"/>
+            <a:ext cx="4856480" cy="2627630"/>
+          </a:xfrm>
+          <a:prstGeom prst="rect">
+            <a:avLst/>
+          </a:prstGeom>
+        </p:spPr>
+      </p:pic>
+    </p:spTree>
+    <p:extLst>
+      <p:ext uri="{BB962C8B-B14F-4D97-AF65-F5344CB8AC3E}">
+        <p14:creationId xmlns:p14="http://schemas.microsoft.com/office/powerpoint/2010/main" val="2745622685"/>
+      </p:ext>
+    </p:extLst>
+  </p:cSld>
+  <p:clrMapOvr>
+    <a:masterClrMapping/>
+  </p:clrMapOvr>
+</p:sld>
+</file>
+
+<file path=ppt/slides/slide11.xml><?xml version="1.0" encoding="utf-8"?>
+<p:sld xmlns:a="http://schemas.openxmlformats.org/drawingml/2006/main" xmlns:r="http://schemas.openxmlformats.org/officeDocument/2006/relationships" xmlns:p="http://schemas.openxmlformats.org/presentationml/2006/main">
+  <p:cSld>
+    <p:spTree>
+      <p:nvGrpSpPr>
+        <p:cNvPr id="1" name=""/>
+        <p:cNvGrpSpPr/>
+        <p:nvPr/>
+      </p:nvGrpSpPr>
+      <p:grpSpPr>
+        <a:xfrm>
+          <a:off x="0" y="0"/>
+          <a:ext cx="0" cy="0"/>
+          <a:chOff x="0" y="0"/>
+          <a:chExt cx="0" cy="0"/>
+        </a:xfrm>
+      </p:grpSpPr>
+      <p:sp>
+        <p:nvSpPr>
+          <p:cNvPr id="2" name="Shape 0"/>
+          <p:cNvSpPr/>
+          <p:nvPr/>
+        </p:nvSpPr>
+        <p:spPr>
+          <a:xfrm>
+            <a:off x="0" y="-34290"/>
+            <a:ext cx="9144000" cy="685800"/>
+          </a:xfrm>
+          <a:prstGeom prst="rect">
+            <a:avLst/>
+          </a:prstGeom>
+          <a:solidFill>
+            <a:srgbClr val="1E2761"/>
+          </a:solidFill>
+          <a:ln w="12700">
+            <a:solidFill>
+              <a:srgbClr val="1E2761"/>
+            </a:solidFill>
+            <a:prstDash val="solid"/>
+          </a:ln>
+        </p:spPr>
+      </p:sp>
+      <p:sp>
+        <p:nvSpPr>
+          <p:cNvPr id="3" name="Text 1"/>
+          <p:cNvSpPr/>
+          <p:nvPr/>
+        </p:nvSpPr>
+        <p:spPr>
+          <a:xfrm>
+            <a:off x="209550" y="-60960"/>
+            <a:ext cx="8595360" cy="685800"/>
+          </a:xfrm>
+          <a:prstGeom prst="rect">
+            <a:avLst/>
+          </a:prstGeom>
+          <a:noFill/>
+          <a:ln/>
+        </p:spPr>
+        <p:txBody>
+          <a:bodyPr wrap="square" rtlCol="0" anchor="ctr"/>
+          <a:lstStyle/>
+          <a:p>
+            <a:pPr marL="0" indent="0">
+              <a:buNone/>
+            </a:pPr>
+            <a:r>
+              <a:rPr lang="en-US" sz="2200" b="1" dirty="0">
+                <a:solidFill>
+                  <a:srgbClr val="FFFFFF"/>
+                </a:solidFill>
+                <a:latin typeface="Calibri" pitchFamily="34" charset="0"/>
+                <a:ea typeface="Calibri" pitchFamily="34" charset="-122"/>
+                <a:cs typeface="Calibri" pitchFamily="34" charset="-120"/>
+              </a:rPr>
+              <a:t>5. Testing and Simulation Results</a:t>
+            </a:r>
+            <a:endParaRPr lang="en-US" sz="2200" dirty="0"/>
+          </a:p>
+        </p:txBody>
+      </p:sp>
+      <p:sp>
+        <p:nvSpPr>
+          <p:cNvPr id="154" name="Text 152"/>
+          <p:cNvSpPr/>
+          <p:nvPr/>
+        </p:nvSpPr>
+        <p:spPr>
+          <a:xfrm>
+            <a:off x="5669280" y="1371600"/>
+            <a:ext cx="3200400" cy="914400"/>
+          </a:xfrm>
+          <a:prstGeom prst="rect">
+            <a:avLst/>
+          </a:prstGeom>
+          <a:noFill/>
+          <a:ln/>
+        </p:spPr>
+        <p:txBody>
+          <a:bodyPr wrap="square" rtlCol="0" anchor="ctr"/>
+          <a:lstStyle/>
+          <a:p>
+            <a:pPr marL="0" indent="0">
+              <a:buNone/>
+            </a:pPr>
+            <a:endParaRPr lang="en-US" sz="1100" dirty="0"/>
+          </a:p>
+        </p:txBody>
+      </p:sp>
+      <p:sp>
+        <p:nvSpPr>
+          <p:cNvPr id="155" name="TextBox 154">
+            <a:extLst>
+              <a:ext uri="{FF2B5EF4-FFF2-40B4-BE49-F238E27FC236}">
+                <a16:creationId xmlns:a16="http://schemas.microsoft.com/office/drawing/2014/main" id="{FDB1C464-ADB0-4AFC-B1EE-024D8C36A903}"/>
+              </a:ext>
+            </a:extLst>
+          </p:cNvPr>
+          <p:cNvSpPr txBox="1"/>
+          <p:nvPr/>
+        </p:nvSpPr>
+        <p:spPr>
+          <a:xfrm>
+            <a:off x="274320" y="933450"/>
+            <a:ext cx="1158240" cy="369332"/>
+          </a:xfrm>
+          <a:prstGeom prst="rect">
+            <a:avLst/>
+          </a:prstGeom>
+          <a:noFill/>
+        </p:spPr>
+        <p:txBody>
+          <a:bodyPr wrap="square" rtlCol="0">
+            <a:spAutoFit/>
+          </a:bodyPr>
+          <a:lstStyle/>
+          <a:p>
+            <a:r>
+              <a:rPr lang="en-US" dirty="0"/>
+              <a:t>SCADERE</a:t>
+            </a:r>
+          </a:p>
+        </p:txBody>
+      </p:sp>
+      <p:pic>
+        <p:nvPicPr>
+          <p:cNvPr id="156" name="Picture 155">
+            <a:extLst>
+              <a:ext uri="{FF2B5EF4-FFF2-40B4-BE49-F238E27FC236}">
+                <a16:creationId xmlns:a16="http://schemas.microsoft.com/office/drawing/2014/main" id="{11D36624-5ADF-41B5-B075-8F6041ED2ED4}"/>
+              </a:ext>
+            </a:extLst>
+          </p:cNvPr>
+          <p:cNvPicPr/>
+          <p:nvPr/>
+        </p:nvPicPr>
+        <p:blipFill>
+          <a:blip r:embed="rId3" cstate="print">
+            <a:extLst>
+              <a:ext uri="{28A0092B-C50C-407E-A947-70E740481C1C}">
+                <a14:useLocalDpi xmlns:a14="http://schemas.microsoft.com/office/drawing/2010/main" val="0"/>
+              </a:ext>
+            </a:extLst>
+          </a:blip>
+          <a:stretch>
+            <a:fillRect/>
+          </a:stretch>
+        </p:blipFill>
+        <p:spPr>
+          <a:xfrm>
+            <a:off x="1230630" y="1524000"/>
+            <a:ext cx="6019800" cy="3159760"/>
+          </a:xfrm>
+          <a:prstGeom prst="rect">
+            <a:avLst/>
+          </a:prstGeom>
+        </p:spPr>
+      </p:pic>
+    </p:spTree>
+    <p:extLst>
+      <p:ext uri="{BB962C8B-B14F-4D97-AF65-F5344CB8AC3E}">
+        <p14:creationId xmlns:p14="http://schemas.microsoft.com/office/powerpoint/2010/main" val="1539871522"/>
+      </p:ext>
+    </p:extLst>
+  </p:cSld>
+  <p:clrMapOvr>
+    <a:masterClrMapping/>
+  </p:clrMapOvr>
+</p:sld>
+</file>
+
+<file path=ppt/slides/slide12.xml><?xml version="1.0" encoding="utf-8"?>
+<p:sld xmlns:a="http://schemas.openxmlformats.org/drawingml/2006/main" xmlns:r="http://schemas.openxmlformats.org/officeDocument/2006/relationships" xmlns:p="http://schemas.openxmlformats.org/presentationml/2006/main">
+  <p:cSld>
+    <p:spTree>
+      <p:nvGrpSpPr>
+        <p:cNvPr id="1" name=""/>
+        <p:cNvGrpSpPr/>
+        <p:nvPr/>
+      </p:nvGrpSpPr>
+      <p:grpSpPr>
+        <a:xfrm>
+          <a:off x="0" y="0"/>
+          <a:ext cx="0" cy="0"/>
+          <a:chOff x="0" y="0"/>
+          <a:chExt cx="0" cy="0"/>
+        </a:xfrm>
+      </p:grpSpPr>
+      <p:sp>
+        <p:nvSpPr>
+          <p:cNvPr id="2" name="Shape 0"/>
+          <p:cNvSpPr/>
+          <p:nvPr/>
+        </p:nvSpPr>
+        <p:spPr>
+          <a:xfrm>
+            <a:off x="0" y="-34290"/>
+            <a:ext cx="9144000" cy="685800"/>
+          </a:xfrm>
+          <a:prstGeom prst="rect">
+            <a:avLst/>
+          </a:prstGeom>
+          <a:solidFill>
+            <a:srgbClr val="1E2761"/>
+          </a:solidFill>
+          <a:ln w="12700">
+            <a:solidFill>
+              <a:srgbClr val="1E2761"/>
+            </a:solidFill>
+            <a:prstDash val="solid"/>
+          </a:ln>
+        </p:spPr>
+      </p:sp>
+      <p:sp>
+        <p:nvSpPr>
+          <p:cNvPr id="3" name="Text 1"/>
+          <p:cNvSpPr/>
+          <p:nvPr/>
+        </p:nvSpPr>
+        <p:spPr>
+          <a:xfrm>
+            <a:off x="209550" y="-60960"/>
+            <a:ext cx="8595360" cy="685800"/>
+          </a:xfrm>
+          <a:prstGeom prst="rect">
+            <a:avLst/>
+          </a:prstGeom>
+          <a:noFill/>
+          <a:ln/>
+        </p:spPr>
+        <p:txBody>
+          <a:bodyPr wrap="square" rtlCol="0" anchor="ctr"/>
+          <a:lstStyle/>
+          <a:p>
+            <a:pPr marL="0" indent="0">
+              <a:buNone/>
+            </a:pPr>
+            <a:r>
+              <a:rPr lang="en-US" sz="2200" b="1" dirty="0">
+                <a:solidFill>
+                  <a:srgbClr val="FFFFFF"/>
+                </a:solidFill>
+                <a:latin typeface="Calibri" pitchFamily="34" charset="0"/>
+                <a:ea typeface="Calibri" pitchFamily="34" charset="-122"/>
+                <a:cs typeface="Calibri" pitchFamily="34" charset="-120"/>
+              </a:rPr>
+              <a:t>5. Testing and Simulation Results</a:t>
+            </a:r>
+            <a:endParaRPr lang="en-US" sz="2200" dirty="0"/>
+          </a:p>
+        </p:txBody>
+      </p:sp>
+      <p:sp>
+        <p:nvSpPr>
+          <p:cNvPr id="154" name="Text 152"/>
+          <p:cNvSpPr/>
+          <p:nvPr/>
+        </p:nvSpPr>
+        <p:spPr>
+          <a:xfrm>
+            <a:off x="5669280" y="1371600"/>
+            <a:ext cx="3200400" cy="914400"/>
+          </a:xfrm>
+          <a:prstGeom prst="rect">
+            <a:avLst/>
+          </a:prstGeom>
+          <a:noFill/>
+          <a:ln/>
+        </p:spPr>
+        <p:txBody>
+          <a:bodyPr wrap="square" rtlCol="0" anchor="ctr"/>
+          <a:lstStyle/>
+          <a:p>
+            <a:pPr marL="0" indent="0">
+              <a:buNone/>
+            </a:pPr>
+            <a:endParaRPr lang="en-US" sz="1100" dirty="0"/>
+          </a:p>
+        </p:txBody>
+      </p:sp>
+      <p:sp>
+        <p:nvSpPr>
+          <p:cNvPr id="155" name="TextBox 154">
+            <a:extLst>
+              <a:ext uri="{FF2B5EF4-FFF2-40B4-BE49-F238E27FC236}">
+                <a16:creationId xmlns:a16="http://schemas.microsoft.com/office/drawing/2014/main" id="{FDB1C464-ADB0-4AFC-B1EE-024D8C36A903}"/>
+              </a:ext>
+            </a:extLst>
+          </p:cNvPr>
+          <p:cNvSpPr txBox="1"/>
+          <p:nvPr/>
+        </p:nvSpPr>
+        <p:spPr>
+          <a:xfrm>
+            <a:off x="274320" y="933450"/>
+            <a:ext cx="1501140" cy="369332"/>
+          </a:xfrm>
+          <a:prstGeom prst="rect">
+            <a:avLst/>
+          </a:prstGeom>
+          <a:noFill/>
+        </p:spPr>
+        <p:txBody>
+          <a:bodyPr wrap="square" rtlCol="0">
+            <a:spAutoFit/>
+          </a:bodyPr>
+          <a:lstStyle/>
+          <a:p>
+            <a:r>
+              <a:rPr lang="en-US" dirty="0"/>
+              <a:t>INMULTIRE</a:t>
+            </a:r>
+          </a:p>
+        </p:txBody>
+      </p:sp>
+      <p:pic>
+        <p:nvPicPr>
+          <p:cNvPr id="10" name="Picture 9">
+            <a:extLst>
+              <a:ext uri="{FF2B5EF4-FFF2-40B4-BE49-F238E27FC236}">
+                <a16:creationId xmlns:a16="http://schemas.microsoft.com/office/drawing/2014/main" id="{1A381B9C-4747-427E-BE4E-778686E0D639}"/>
+              </a:ext>
+            </a:extLst>
+          </p:cNvPr>
+          <p:cNvPicPr/>
+          <p:nvPr/>
+        </p:nvPicPr>
+        <p:blipFill>
+          <a:blip r:embed="rId3"/>
+          <a:stretch>
+            <a:fillRect/>
+          </a:stretch>
+        </p:blipFill>
+        <p:spPr>
+          <a:xfrm>
+            <a:off x="1386840" y="1618616"/>
+            <a:ext cx="5943600" cy="2477770"/>
+          </a:xfrm>
+          <a:prstGeom prst="rect">
+            <a:avLst/>
+          </a:prstGeom>
+        </p:spPr>
+      </p:pic>
+    </p:spTree>
+    <p:extLst>
+      <p:ext uri="{BB962C8B-B14F-4D97-AF65-F5344CB8AC3E}">
+        <p14:creationId xmlns:p14="http://schemas.microsoft.com/office/powerpoint/2010/main" val="571374134"/>
+      </p:ext>
+    </p:extLst>
+  </p:cSld>
+  <p:clrMapOvr>
+    <a:masterClrMapping/>
+  </p:clrMapOvr>
+</p:sld>
+</file>
+
+<file path=ppt/slides/slide13.xml><?xml version="1.0" encoding="utf-8"?>
+<p:sld xmlns:a="http://schemas.openxmlformats.org/drawingml/2006/main" xmlns:r="http://schemas.openxmlformats.org/officeDocument/2006/relationships" xmlns:p="http://schemas.openxmlformats.org/presentationml/2006/main">
+  <p:cSld>
+    <p:spTree>
+      <p:nvGrpSpPr>
+        <p:cNvPr id="1" name=""/>
+        <p:cNvGrpSpPr/>
+        <p:nvPr/>
+      </p:nvGrpSpPr>
+      <p:grpSpPr>
+        <a:xfrm>
+          <a:off x="0" y="0"/>
+          <a:ext cx="0" cy="0"/>
+          <a:chOff x="0" y="0"/>
+          <a:chExt cx="0" cy="0"/>
+        </a:xfrm>
+      </p:grpSpPr>
+      <p:sp>
+        <p:nvSpPr>
+          <p:cNvPr id="2" name="Shape 0"/>
+          <p:cNvSpPr/>
+          <p:nvPr/>
+        </p:nvSpPr>
+        <p:spPr>
+          <a:xfrm>
+            <a:off x="0" y="-34290"/>
+            <a:ext cx="9144000" cy="685800"/>
+          </a:xfrm>
+          <a:prstGeom prst="rect">
+            <a:avLst/>
+          </a:prstGeom>
+          <a:solidFill>
+            <a:srgbClr val="1E2761"/>
+          </a:solidFill>
+          <a:ln w="12700">
+            <a:solidFill>
+              <a:srgbClr val="1E2761"/>
+            </a:solidFill>
+            <a:prstDash val="solid"/>
+          </a:ln>
+        </p:spPr>
+      </p:sp>
+      <p:sp>
+        <p:nvSpPr>
+          <p:cNvPr id="3" name="Text 1"/>
+          <p:cNvSpPr/>
+          <p:nvPr/>
+        </p:nvSpPr>
+        <p:spPr>
+          <a:xfrm>
+            <a:off x="209550" y="-60960"/>
+            <a:ext cx="8595360" cy="685800"/>
+          </a:xfrm>
+          <a:prstGeom prst="rect">
+            <a:avLst/>
+          </a:prstGeom>
+          <a:noFill/>
+          <a:ln/>
+        </p:spPr>
+        <p:txBody>
+          <a:bodyPr wrap="square" rtlCol="0" anchor="ctr"/>
+          <a:lstStyle/>
+          <a:p>
+            <a:pPr marL="0" indent="0">
+              <a:buNone/>
+            </a:pPr>
+            <a:r>
+              <a:rPr lang="en-US" sz="2200" b="1" dirty="0">
+                <a:solidFill>
+                  <a:srgbClr val="FFFFFF"/>
+                </a:solidFill>
+                <a:latin typeface="Calibri" pitchFamily="34" charset="0"/>
+                <a:ea typeface="Calibri" pitchFamily="34" charset="-122"/>
+                <a:cs typeface="Calibri" pitchFamily="34" charset="-120"/>
+              </a:rPr>
+              <a:t>5. Testing and Simulation Results</a:t>
+            </a:r>
+            <a:endParaRPr lang="en-US" sz="2200" dirty="0"/>
+          </a:p>
+        </p:txBody>
+      </p:sp>
+      <p:sp>
+        <p:nvSpPr>
+          <p:cNvPr id="154" name="Text 152"/>
+          <p:cNvSpPr/>
+          <p:nvPr/>
+        </p:nvSpPr>
+        <p:spPr>
+          <a:xfrm>
+            <a:off x="5669280" y="1371600"/>
+            <a:ext cx="3200400" cy="914400"/>
+          </a:xfrm>
+          <a:prstGeom prst="rect">
+            <a:avLst/>
+          </a:prstGeom>
+          <a:noFill/>
+          <a:ln/>
+        </p:spPr>
+        <p:txBody>
+          <a:bodyPr wrap="square" rtlCol="0" anchor="ctr"/>
+          <a:lstStyle/>
+          <a:p>
+            <a:pPr marL="0" indent="0">
+              <a:buNone/>
+            </a:pPr>
+            <a:endParaRPr lang="en-US" sz="1100" dirty="0"/>
+          </a:p>
+        </p:txBody>
+      </p:sp>
+      <p:sp>
+        <p:nvSpPr>
+          <p:cNvPr id="155" name="TextBox 154">
+            <a:extLst>
+              <a:ext uri="{FF2B5EF4-FFF2-40B4-BE49-F238E27FC236}">
+                <a16:creationId xmlns:a16="http://schemas.microsoft.com/office/drawing/2014/main" id="{FDB1C464-ADB0-4AFC-B1EE-024D8C36A903}"/>
+              </a:ext>
+            </a:extLst>
+          </p:cNvPr>
+          <p:cNvSpPr txBox="1"/>
+          <p:nvPr/>
+        </p:nvSpPr>
+        <p:spPr>
+          <a:xfrm>
+            <a:off x="274320" y="933450"/>
+            <a:ext cx="1405890" cy="369332"/>
+          </a:xfrm>
+          <a:prstGeom prst="rect">
+            <a:avLst/>
+          </a:prstGeom>
+          <a:noFill/>
+        </p:spPr>
+        <p:txBody>
+          <a:bodyPr wrap="square" rtlCol="0">
+            <a:spAutoFit/>
+          </a:bodyPr>
+          <a:lstStyle/>
+          <a:p>
+            <a:r>
+              <a:rPr lang="en-US" dirty="0"/>
+              <a:t>IMPARTIRE</a:t>
+            </a:r>
+          </a:p>
+        </p:txBody>
+      </p:sp>
+      <p:pic>
+        <p:nvPicPr>
+          <p:cNvPr id="7" name="Picture 6">
+            <a:extLst>
+              <a:ext uri="{FF2B5EF4-FFF2-40B4-BE49-F238E27FC236}">
+                <a16:creationId xmlns:a16="http://schemas.microsoft.com/office/drawing/2014/main" id="{01BE58CA-40A5-4732-8E07-1DA71BD8B274}"/>
+              </a:ext>
+            </a:extLst>
+          </p:cNvPr>
+          <p:cNvPicPr/>
+          <p:nvPr/>
+        </p:nvPicPr>
+        <p:blipFill>
+          <a:blip r:embed="rId3"/>
+          <a:stretch>
+            <a:fillRect/>
+          </a:stretch>
+        </p:blipFill>
+        <p:spPr>
+          <a:xfrm>
+            <a:off x="1325880" y="1518602"/>
+            <a:ext cx="5943600" cy="3028315"/>
+          </a:xfrm>
+          <a:prstGeom prst="rect">
+            <a:avLst/>
+          </a:prstGeom>
+        </p:spPr>
+      </p:pic>
+    </p:spTree>
+    <p:extLst>
+      <p:ext uri="{BB962C8B-B14F-4D97-AF65-F5344CB8AC3E}">
+        <p14:creationId xmlns:p14="http://schemas.microsoft.com/office/powerpoint/2010/main" val="2889131427"/>
+      </p:ext>
+    </p:extLst>
+  </p:cSld>
+  <p:clrMapOvr>
+    <a:masterClrMapping/>
+  </p:clrMapOvr>
+</p:sld>
+</file>
+
+<file path=ppt/slides/slide14.xml><?xml version="1.0" encoding="utf-8"?>
 <p:sld xmlns:a="http://schemas.openxmlformats.org/drawingml/2006/main" xmlns:r="http://schemas.openxmlformats.org/officeDocument/2006/relationships" xmlns:p="http://schemas.openxmlformats.org/presentationml/2006/main">
   <p:cSld name="Slide 9">
     <p:bg>
